--- a/addons/amunet_label/static/templates/PLANTILLA_H.pptx
+++ b/addons/amunet_label/static/templates/PLANTILLA_H.pptx
@@ -3543,8 +3543,8 @@
           </p:nvSpPr>
           <p:spPr>
             <a:xfrm>
-              <a:off x="345616" y="783346"/>
-              <a:ext cx="2932347" cy="989438"/>
+              <a:off x="345617" y="783346"/>
+              <a:ext cx="2625118" cy="1243354"/>
             </a:xfrm>
             <a:prstGeom prst="rect">
               <a:avLst/>
@@ -3590,7 +3590,7 @@
                   <a:cs typeface="Now"/>
                   <a:sym typeface="Now"/>
                 </a:rPr>
-                <a:t>-{{N}} {{CONTENEDOR}}</a:t>
+                <a:t>-{{N}} {{ACCESORIO}}</a:t>
               </a:r>
             </a:p>
             <a:p>
@@ -3609,7 +3609,7 @@
                   <a:cs typeface="Now"/>
                   <a:sym typeface="Now"/>
                 </a:rPr>
-                <a:t>-{{N}} {{ACCESORIO}}</a:t>
+                <a:t>-{{N}} {{CONTENEDOR}}</a:t>
               </a:r>
             </a:p>
             <a:p>

--- a/addons/amunet_label/static/templates/PLANTILLA_H.pptx
+++ b/addons/amunet_label/static/templates/PLANTILLA_H.pptx
@@ -112,6 +112,20 @@
       <p15:sldGuideLst xmlns:p15="http://schemas.microsoft.com/office/powerpoint/2012/main"/>
     </p:ext>
   </p:extLst>
+  <p:embeddedFontLst>
+    <p:embeddedFont>
+      <p:font typeface="Kollektif"/>
+      <p:regular r:id="rId8"/>
+      <p:bold r:id="rId9"/>
+      <p:italic r:id="rId10"/>
+      <p:boldItalic r:id="rId11"/>
+    </p:embeddedFont>
+    <p:embeddedFont>
+      <p:font typeface="Now"/>
+      <p:regular r:id="rId12"/>
+      <p:bold r:id="rId13"/>
+    </p:embeddedFont>
+  </p:embeddedFontLst>
 </p:presentation>
 </file>
 
